--- a/spec/Functions/specificFunctions/p1StreamPmData/p1ProcessDevice/p1TransmittingKafka/1.0.0/parameterHandling.pptx
+++ b/spec/Functions/specificFunctions/p1StreamPmData/p1ProcessDevice/p1TransmittingKafka/1.0.0/parameterHandling.pptx
@@ -5268,6 +5268,26 @@
                 <a:latin typeface="On Air" panose="020F0503030404020204" pitchFamily="34" charset="0"/>
                 <a:cs typeface="On Air" panose="020F0503030404020204" pitchFamily="34" charset="0"/>
               </a:rPr>
+              <a:t> </a:t>
+            </a:r>
+            <a:br>
+              <a:rPr lang="de-DE" sz="800" dirty="0">
+                <a:latin typeface="On Air" panose="020F0503030404020204" pitchFamily="34" charset="0"/>
+                <a:cs typeface="On Air" panose="020F0503030404020204" pitchFamily="34" charset="0"/>
+              </a:rPr>
+            </a:br>
+            <a:r>
+              <a:rPr lang="de-DE" sz="800" dirty="0" err="1">
+                <a:latin typeface="On Air" panose="020F0503030404020204" pitchFamily="34" charset="0"/>
+                <a:cs typeface="On Air" panose="020F0503030404020204" pitchFamily="34" charset="0"/>
+              </a:rPr>
+              <a:t>purpose</a:t>
+            </a:r>
+            <a:r>
+              <a:rPr lang="de-DE" sz="800" dirty="0">
+                <a:latin typeface="On Air" panose="020F0503030404020204" pitchFamily="34" charset="0"/>
+                <a:cs typeface="On Air" panose="020F0503030404020204" pitchFamily="34" charset="0"/>
+              </a:rPr>
               <a:t> = „</a:t>
             </a:r>
             <a:r>
@@ -5330,6 +5350,19 @@
                 <a:cs typeface="On Air" panose="020F0503030404020204" pitchFamily="34" charset="0"/>
               </a:rPr>
               <a:t>parameter</a:t>
+            </a:r>
+            <a:br>
+              <a:rPr lang="de-DE" sz="800" dirty="0">
+                <a:latin typeface="On Air" panose="020F0503030404020204" pitchFamily="34" charset="0"/>
+                <a:cs typeface="On Air" panose="020F0503030404020204" pitchFamily="34" charset="0"/>
+              </a:rPr>
+            </a:br>
+            <a:r>
+              <a:rPr lang="de-DE" sz="800" dirty="0" err="1">
+                <a:latin typeface="On Air" panose="020F0503030404020204" pitchFamily="34" charset="0"/>
+                <a:cs typeface="On Air" panose="020F0503030404020204" pitchFamily="34" charset="0"/>
+              </a:rPr>
+              <a:t>purpose</a:t>
             </a:r>
             <a:r>
               <a:rPr lang="de-DE" sz="800" dirty="0">
@@ -5659,8 +5692,8 @@
         </p:nvCxnSpPr>
         <p:spPr>
           <a:xfrm>
-            <a:off x="1525801" y="1264517"/>
-            <a:ext cx="1158246" cy="1487081"/>
+            <a:off x="1454727" y="1471353"/>
+            <a:ext cx="1229320" cy="1280245"/>
           </a:xfrm>
           <a:prstGeom prst="straightConnector1">
             <a:avLst/>
